--- a/proposals/機種分析/北斗の拳/hokuto_guide_v2.pptx
+++ b/proposals/機種分析/北斗の拳/hokuto_guide_v2.pptx
@@ -3363,7 +3363,7 @@
         <p:spPr>
           <a:xfrm>
             <a:off x="201168" y="2926080"/>
-            <a:ext cx="1417320" cy="230000"/>
+            <a:ext cx="1417320" cy="215000"/>
           </a:xfrm>
           <a:prstGeom prst="rect">
             <a:avLst/>
@@ -3378,7 +3378,7 @@
           <a:p>
             <a:pPr algn="l"/>
             <a:r>
-              <a:rPr sz="800" b="1">
+              <a:rPr sz="750" b="1">
                 <a:solidFill>
                   <a:srgbClr val="8888AA"/>
                 </a:solidFill>
@@ -3398,7 +3398,7 @@
         <p:spPr>
           <a:xfrm>
             <a:off x="1664208" y="2926080"/>
-            <a:ext cx="3063240" cy="230000"/>
+            <a:ext cx="3063240" cy="215000"/>
           </a:xfrm>
           <a:prstGeom prst="rect">
             <a:avLst/>
@@ -3413,7 +3413,7 @@
           <a:p>
             <a:pPr algn="l"/>
             <a:r>
-              <a:rPr sz="800" b="0">
+              <a:rPr sz="750" b="0">
                 <a:solidFill>
                   <a:srgbClr val="D0C0A0"/>
                 </a:solidFill>
@@ -3432,8 +3432,8 @@
         </p:nvSpPr>
         <p:spPr>
           <a:xfrm>
-            <a:off x="201168" y="3161080"/>
-            <a:ext cx="1417320" cy="230000"/>
+            <a:off x="201168" y="3144080"/>
+            <a:ext cx="1417320" cy="215000"/>
           </a:xfrm>
           <a:prstGeom prst="rect">
             <a:avLst/>
@@ -3448,7 +3448,7 @@
           <a:p>
             <a:pPr algn="l"/>
             <a:r>
-              <a:rPr sz="800" b="1">
+              <a:rPr sz="750" b="1">
                 <a:solidFill>
                   <a:srgbClr val="8888AA"/>
                 </a:solidFill>
@@ -3467,8 +3467,8 @@
         </p:nvSpPr>
         <p:spPr>
           <a:xfrm>
-            <a:off x="1664208" y="3161080"/>
-            <a:ext cx="3063240" cy="230000"/>
+            <a:off x="1664208" y="3144080"/>
+            <a:ext cx="3063240" cy="215000"/>
           </a:xfrm>
           <a:prstGeom prst="rect">
             <a:avLst/>
@@ -3483,7 +3483,7 @@
           <a:p>
             <a:pPr algn="l"/>
             <a:r>
-              <a:rPr sz="800" b="0">
+              <a:rPr sz="750" b="0">
                 <a:solidFill>
                   <a:srgbClr val="D0C0A0"/>
                 </a:solidFill>
@@ -3502,8 +3502,8 @@
         </p:nvSpPr>
         <p:spPr>
           <a:xfrm>
-            <a:off x="201168" y="3396080"/>
-            <a:ext cx="1417320" cy="230000"/>
+            <a:off x="201168" y="3362080"/>
+            <a:ext cx="1417320" cy="215000"/>
           </a:xfrm>
           <a:prstGeom prst="rect">
             <a:avLst/>
@@ -3518,7 +3518,7 @@
           <a:p>
             <a:pPr algn="l"/>
             <a:r>
-              <a:rPr sz="800" b="1">
+              <a:rPr sz="750" b="1">
                 <a:solidFill>
                   <a:srgbClr val="8888AA"/>
                 </a:solidFill>
@@ -3537,8 +3537,8 @@
         </p:nvSpPr>
         <p:spPr>
           <a:xfrm>
-            <a:off x="1664208" y="3396080"/>
-            <a:ext cx="3063240" cy="230000"/>
+            <a:off x="1664208" y="3362080"/>
+            <a:ext cx="3063240" cy="215000"/>
           </a:xfrm>
           <a:prstGeom prst="rect">
             <a:avLst/>
@@ -3553,7 +3553,7 @@
           <a:p>
             <a:pPr algn="l"/>
             <a:r>
-              <a:rPr sz="800" b="0">
+              <a:rPr sz="750" b="0">
                 <a:solidFill>
                   <a:srgbClr val="D0C0A0"/>
                 </a:solidFill>
@@ -3572,8 +3572,8 @@
         </p:nvSpPr>
         <p:spPr>
           <a:xfrm>
-            <a:off x="201168" y="3631080"/>
-            <a:ext cx="1417320" cy="230000"/>
+            <a:off x="201168" y="3580080"/>
+            <a:ext cx="1417320" cy="215000"/>
           </a:xfrm>
           <a:prstGeom prst="rect">
             <a:avLst/>
@@ -3588,7 +3588,7 @@
           <a:p>
             <a:pPr algn="l"/>
             <a:r>
-              <a:rPr sz="800" b="1">
+              <a:rPr sz="750" b="1">
                 <a:solidFill>
                   <a:srgbClr val="8888AA"/>
                 </a:solidFill>
@@ -3607,8 +3607,8 @@
         </p:nvSpPr>
         <p:spPr>
           <a:xfrm>
-            <a:off x="1664208" y="3631080"/>
-            <a:ext cx="3063240" cy="230000"/>
+            <a:off x="1664208" y="3580080"/>
+            <a:ext cx="3063240" cy="215000"/>
           </a:xfrm>
           <a:prstGeom prst="rect">
             <a:avLst/>
@@ -3623,7 +3623,7 @@
           <a:p>
             <a:pPr algn="l"/>
             <a:r>
-              <a:rPr sz="800" b="0">
+              <a:rPr sz="750" b="0">
                 <a:solidFill>
                   <a:srgbClr val="D0C0A0"/>
                 </a:solidFill>
@@ -3642,8 +3642,8 @@
         </p:nvSpPr>
         <p:spPr>
           <a:xfrm>
-            <a:off x="201168" y="3866080"/>
-            <a:ext cx="1417320" cy="230000"/>
+            <a:off x="201168" y="3798080"/>
+            <a:ext cx="1417320" cy="215000"/>
           </a:xfrm>
           <a:prstGeom prst="rect">
             <a:avLst/>
@@ -3658,7 +3658,7 @@
           <a:p>
             <a:pPr algn="l"/>
             <a:r>
-              <a:rPr sz="800" b="1">
+              <a:rPr sz="750" b="1">
                 <a:solidFill>
                   <a:srgbClr val="8888AA"/>
                 </a:solidFill>
@@ -3677,8 +3677,8 @@
         </p:nvSpPr>
         <p:spPr>
           <a:xfrm>
-            <a:off x="1664208" y="3866080"/>
-            <a:ext cx="3063240" cy="230000"/>
+            <a:off x="1664208" y="3798080"/>
+            <a:ext cx="3063240" cy="215000"/>
           </a:xfrm>
           <a:prstGeom prst="rect">
             <a:avLst/>
@@ -3693,7 +3693,7 @@
           <a:p>
             <a:pPr algn="l"/>
             <a:r>
-              <a:rPr sz="800" b="0">
+              <a:rPr sz="750" b="0">
                 <a:solidFill>
                   <a:srgbClr val="D0C0A0"/>
                 </a:solidFill>
@@ -3712,8 +3712,8 @@
         </p:nvSpPr>
         <p:spPr>
           <a:xfrm>
-            <a:off x="201168" y="4101080"/>
-            <a:ext cx="1417320" cy="230000"/>
+            <a:off x="201168" y="4016080"/>
+            <a:ext cx="1417320" cy="215000"/>
           </a:xfrm>
           <a:prstGeom prst="rect">
             <a:avLst/>
@@ -3728,7 +3728,7 @@
           <a:p>
             <a:pPr algn="l"/>
             <a:r>
-              <a:rPr sz="800" b="1">
+              <a:rPr sz="750" b="1">
                 <a:solidFill>
                   <a:srgbClr val="8888AA"/>
                 </a:solidFill>
@@ -3747,8 +3747,8 @@
         </p:nvSpPr>
         <p:spPr>
           <a:xfrm>
-            <a:off x="1664208" y="4101080"/>
-            <a:ext cx="3063240" cy="230000"/>
+            <a:off x="1664208" y="4016080"/>
+            <a:ext cx="3063240" cy="215000"/>
           </a:xfrm>
           <a:prstGeom prst="rect">
             <a:avLst/>
@@ -3763,7 +3763,7 @@
           <a:p>
             <a:pPr algn="l"/>
             <a:r>
-              <a:rPr sz="800" b="0">
+              <a:rPr sz="750" b="0">
                 <a:solidFill>
                   <a:srgbClr val="D0C0A0"/>
                 </a:solidFill>
@@ -3782,8 +3782,8 @@
         </p:nvSpPr>
         <p:spPr>
           <a:xfrm>
-            <a:off x="201168" y="4336080"/>
-            <a:ext cx="1417320" cy="230000"/>
+            <a:off x="201168" y="4234080"/>
+            <a:ext cx="1417320" cy="215000"/>
           </a:xfrm>
           <a:prstGeom prst="rect">
             <a:avLst/>
@@ -3798,7 +3798,7 @@
           <a:p>
             <a:pPr algn="l"/>
             <a:r>
-              <a:rPr sz="800" b="1">
+              <a:rPr sz="750" b="1">
                 <a:solidFill>
                   <a:srgbClr val="8888AA"/>
                 </a:solidFill>
@@ -3817,8 +3817,8 @@
         </p:nvSpPr>
         <p:spPr>
           <a:xfrm>
-            <a:off x="1664208" y="4336080"/>
-            <a:ext cx="3063240" cy="230000"/>
+            <a:off x="1664208" y="4234080"/>
+            <a:ext cx="3063240" cy="215000"/>
           </a:xfrm>
           <a:prstGeom prst="rect">
             <a:avLst/>
@@ -3833,7 +3833,7 @@
           <a:p>
             <a:pPr algn="l"/>
             <a:r>
-              <a:rPr sz="800" b="0">
+              <a:rPr sz="750" b="0">
                 <a:solidFill>
                   <a:srgbClr val="D0C0A0"/>
                 </a:solidFill>
@@ -3852,7 +3852,7 @@
         </p:nvSpPr>
         <p:spPr>
           <a:xfrm>
-            <a:off x="5166360" y="640080"/>
+            <a:off x="5166360" y="274320"/>
             <a:ext cx="3749039" cy="1170432"/>
           </a:xfrm>
           <a:prstGeom prst="rect">
@@ -3897,7 +3897,7 @@
         </p:nvSpPr>
         <p:spPr>
           <a:xfrm>
-            <a:off x="5166360" y="640080"/>
+            <a:off x="5166360" y="274320"/>
             <a:ext cx="55000" cy="1170432"/>
           </a:xfrm>
           <a:prstGeom prst="rect">
@@ -3940,7 +3940,7 @@
         </p:nvSpPr>
         <p:spPr>
           <a:xfrm>
-            <a:off x="5349240" y="695080"/>
+            <a:off x="5349240" y="329320"/>
             <a:ext cx="3474720" cy="310000"/>
           </a:xfrm>
           <a:prstGeom prst="rect">
@@ -3975,7 +3975,7 @@
         </p:nvSpPr>
         <p:spPr>
           <a:xfrm>
-            <a:off x="5349240" y="1020080"/>
+            <a:off x="5349240" y="654320"/>
             <a:ext cx="3474720" cy="420000"/>
           </a:xfrm>
           <a:prstGeom prst="rect">
@@ -4011,7 +4011,7 @@
         </p:nvSpPr>
         <p:spPr>
           <a:xfrm>
-            <a:off x="5166360" y="2057400"/>
+            <a:off x="5166360" y="1645920"/>
             <a:ext cx="3749039" cy="1170432"/>
           </a:xfrm>
           <a:prstGeom prst="rect">
@@ -4056,7 +4056,7 @@
         </p:nvSpPr>
         <p:spPr>
           <a:xfrm>
-            <a:off x="5166360" y="2057400"/>
+            <a:off x="5166360" y="1645920"/>
             <a:ext cx="55000" cy="1170432"/>
           </a:xfrm>
           <a:prstGeom prst="rect">
@@ -4099,7 +4099,7 @@
         </p:nvSpPr>
         <p:spPr>
           <a:xfrm>
-            <a:off x="5349240" y="2112400"/>
+            <a:off x="5349240" y="1700920"/>
             <a:ext cx="3474720" cy="310000"/>
           </a:xfrm>
           <a:prstGeom prst="rect">
@@ -4134,7 +4134,7 @@
         </p:nvSpPr>
         <p:spPr>
           <a:xfrm>
-            <a:off x="5349240" y="2437400"/>
+            <a:off x="5349240" y="2025920"/>
             <a:ext cx="3474720" cy="420000"/>
           </a:xfrm>
           <a:prstGeom prst="rect">
@@ -4170,7 +4170,7 @@
         </p:nvSpPr>
         <p:spPr>
           <a:xfrm>
-            <a:off x="5166360" y="3474720"/>
+            <a:off x="5166360" y="3017520"/>
             <a:ext cx="3749039" cy="1170432"/>
           </a:xfrm>
           <a:prstGeom prst="rect">
@@ -4215,7 +4215,7 @@
         </p:nvSpPr>
         <p:spPr>
           <a:xfrm>
-            <a:off x="5166360" y="3474720"/>
+            <a:off x="5166360" y="3017520"/>
             <a:ext cx="55000" cy="1170432"/>
           </a:xfrm>
           <a:prstGeom prst="rect">
@@ -4258,7 +4258,7 @@
         </p:nvSpPr>
         <p:spPr>
           <a:xfrm>
-            <a:off x="5349240" y="3529720"/>
+            <a:off x="5349240" y="3072520"/>
             <a:ext cx="3474720" cy="310000"/>
           </a:xfrm>
           <a:prstGeom prst="rect">
@@ -4293,7 +4293,7 @@
         </p:nvSpPr>
         <p:spPr>
           <a:xfrm>
-            <a:off x="5349240" y="3854720"/>
+            <a:off x="5349240" y="3397520"/>
             <a:ext cx="3474720" cy="420000"/>
           </a:xfrm>
           <a:prstGeom prst="rect">
@@ -4641,7 +4641,7 @@
         <p:spPr>
           <a:xfrm>
             <a:off x="164592" y="640080"/>
-            <a:ext cx="2011680" cy="1536192"/>
+            <a:ext cx="1874519" cy="1536192"/>
           </a:xfrm>
           <a:prstGeom prst="rect">
             <a:avLst/>
@@ -4686,7 +4686,7 @@
         <p:spPr>
           <a:xfrm>
             <a:off x="234592" y="690080"/>
-            <a:ext cx="1881680" cy="290000"/>
+            <a:ext cx="1744519" cy="290000"/>
           </a:xfrm>
           <a:prstGeom prst="rect">
             <a:avLst/>
@@ -4721,7 +4721,7 @@
         <p:spPr>
           <a:xfrm>
             <a:off x="224592" y="980080"/>
-            <a:ext cx="1901680" cy="980000"/>
+            <a:ext cx="1764519" cy="980000"/>
           </a:xfrm>
           <a:prstGeom prst="rect">
             <a:avLst/>
@@ -4757,8 +4757,8 @@
         </p:nvSpPr>
         <p:spPr>
           <a:xfrm>
-            <a:off x="2377440" y="640080"/>
-            <a:ext cx="2011680" cy="1536192"/>
+            <a:off x="2221991" y="640080"/>
+            <a:ext cx="1874519" cy="1536192"/>
           </a:xfrm>
           <a:prstGeom prst="rect">
             <a:avLst/>
@@ -4802,8 +4802,8 @@
         </p:nvSpPr>
         <p:spPr>
           <a:xfrm>
-            <a:off x="2447440" y="690080"/>
-            <a:ext cx="1881680" cy="290000"/>
+            <a:off x="2291991" y="690080"/>
+            <a:ext cx="1744519" cy="290000"/>
           </a:xfrm>
           <a:prstGeom prst="rect">
             <a:avLst/>
@@ -4837,8 +4837,8 @@
         </p:nvSpPr>
         <p:spPr>
           <a:xfrm>
-            <a:off x="2437440" y="980080"/>
-            <a:ext cx="1901680" cy="980000"/>
+            <a:off x="2281991" y="980080"/>
+            <a:ext cx="1764519" cy="980000"/>
           </a:xfrm>
           <a:prstGeom prst="rect">
             <a:avLst/>
@@ -4874,8 +4874,8 @@
         </p:nvSpPr>
         <p:spPr>
           <a:xfrm>
-            <a:off x="4590288" y="640080"/>
-            <a:ext cx="2011680" cy="1536192"/>
+            <a:off x="4279390" y="640080"/>
+            <a:ext cx="1874519" cy="1536192"/>
           </a:xfrm>
           <a:prstGeom prst="rect">
             <a:avLst/>
@@ -4919,8 +4919,8 @@
         </p:nvSpPr>
         <p:spPr>
           <a:xfrm>
-            <a:off x="4660288" y="690080"/>
-            <a:ext cx="1881680" cy="290000"/>
+            <a:off x="4349390" y="690080"/>
+            <a:ext cx="1744519" cy="290000"/>
           </a:xfrm>
           <a:prstGeom prst="rect">
             <a:avLst/>
@@ -4954,8 +4954,8 @@
         </p:nvSpPr>
         <p:spPr>
           <a:xfrm>
-            <a:off x="4650288" y="980080"/>
-            <a:ext cx="1901680" cy="980000"/>
+            <a:off x="4339390" y="980080"/>
+            <a:ext cx="1764519" cy="980000"/>
           </a:xfrm>
           <a:prstGeom prst="rect">
             <a:avLst/>
@@ -4991,8 +4991,8 @@
         </p:nvSpPr>
         <p:spPr>
           <a:xfrm>
-            <a:off x="6803136" y="640080"/>
-            <a:ext cx="2011680" cy="1536192"/>
+            <a:off x="6336789" y="640080"/>
+            <a:ext cx="1874519" cy="1536192"/>
           </a:xfrm>
           <a:prstGeom prst="rect">
             <a:avLst/>
@@ -5036,8 +5036,8 @@
         </p:nvSpPr>
         <p:spPr>
           <a:xfrm>
-            <a:off x="6873136" y="690080"/>
-            <a:ext cx="1881680" cy="290000"/>
+            <a:off x="6406789" y="690080"/>
+            <a:ext cx="1744519" cy="290000"/>
           </a:xfrm>
           <a:prstGeom prst="rect">
             <a:avLst/>
@@ -5071,8 +5071,8 @@
         </p:nvSpPr>
         <p:spPr>
           <a:xfrm>
-            <a:off x="6863136" y="980080"/>
-            <a:ext cx="1901680" cy="980000"/>
+            <a:off x="6396789" y="980080"/>
+            <a:ext cx="1764519" cy="980000"/>
           </a:xfrm>
           <a:prstGeom prst="rect">
             <a:avLst/>
@@ -5108,7 +5108,7 @@
         </p:nvSpPr>
         <p:spPr>
           <a:xfrm>
-            <a:off x="2216272" y="1318176"/>
+            <a:off x="2079111" y="1318176"/>
             <a:ext cx="200000" cy="180000"/>
           </a:xfrm>
           <a:prstGeom prst="can">
@@ -5151,7 +5151,7 @@
         </p:nvSpPr>
         <p:spPr>
           <a:xfrm>
-            <a:off x="4429120" y="1318176"/>
+            <a:off x="4136510" y="1318176"/>
             <a:ext cx="200000" cy="180000"/>
           </a:xfrm>
           <a:prstGeom prst="can">
@@ -5194,7 +5194,7 @@
         </p:nvSpPr>
         <p:spPr>
           <a:xfrm>
-            <a:off x="6641968" y="1318176"/>
+            <a:off x="6193909" y="1318176"/>
             <a:ext cx="200000" cy="180000"/>
           </a:xfrm>
           <a:prstGeom prst="can">
@@ -5238,7 +5238,7 @@
         <p:spPr>
           <a:xfrm>
             <a:off x="164592" y="2206272"/>
-            <a:ext cx="2011680" cy="230000"/>
+            <a:ext cx="1874519" cy="230000"/>
           </a:xfrm>
           <a:prstGeom prst="rect">
             <a:avLst/>
@@ -5273,7 +5273,7 @@
         </p:nvSpPr>
         <p:spPr>
           <a:xfrm>
-            <a:off x="8834816" y="1383176"/>
+            <a:off x="8231308" y="1383176"/>
             <a:ext cx="50000" cy="909536"/>
           </a:xfrm>
           <a:prstGeom prst="rect">
@@ -5316,7 +5316,7 @@
         </p:nvSpPr>
         <p:spPr>
           <a:xfrm>
-            <a:off x="8834816" y="2267712"/>
+            <a:off x="8231308" y="2267712"/>
             <a:ext cx="700000" cy="50000"/>
           </a:xfrm>
           <a:prstGeom prst="rect">
@@ -5359,7 +5359,7 @@
         </p:nvSpPr>
         <p:spPr>
           <a:xfrm>
-            <a:off x="9484816" y="2267712"/>
+            <a:off x="8881308" y="2267712"/>
             <a:ext cx="50000" cy="653504"/>
           </a:xfrm>
           <a:prstGeom prst="rect">
@@ -5402,7 +5402,7 @@
         </p:nvSpPr>
         <p:spPr>
           <a:xfrm>
-            <a:off x="8894816" y="1957712"/>
+            <a:off x="8291308" y="1957712"/>
             <a:ext cx="590000" cy="300000"/>
           </a:xfrm>
           <a:prstGeom prst="rect">
@@ -5438,8 +5438,8 @@
         </p:nvSpPr>
         <p:spPr>
           <a:xfrm>
-            <a:off x="6803136" y="2359152"/>
-            <a:ext cx="2011680" cy="1024128"/>
+            <a:off x="6336789" y="2359152"/>
+            <a:ext cx="1874519" cy="1024128"/>
           </a:xfrm>
           <a:prstGeom prst="rect">
             <a:avLst/>
@@ -5483,8 +5483,8 @@
         </p:nvSpPr>
         <p:spPr>
           <a:xfrm>
-            <a:off x="6873136" y="2397152"/>
-            <a:ext cx="1881680" cy="265000"/>
+            <a:off x="6406789" y="2397152"/>
+            <a:ext cx="1744519" cy="265000"/>
           </a:xfrm>
           <a:prstGeom prst="rect">
             <a:avLst/>
@@ -5518,8 +5518,8 @@
         </p:nvSpPr>
         <p:spPr>
           <a:xfrm>
-            <a:off x="6863136" y="2664152"/>
-            <a:ext cx="1901680" cy="664128"/>
+            <a:off x="6396789" y="2664152"/>
+            <a:ext cx="1764519" cy="664128"/>
           </a:xfrm>
           <a:prstGeom prst="rect">
             <a:avLst/>
@@ -5554,8 +5554,8 @@
         </p:nvSpPr>
         <p:spPr>
           <a:xfrm>
-            <a:off x="4590288" y="2359152"/>
-            <a:ext cx="2011680" cy="1024128"/>
+            <a:off x="4279390" y="2359152"/>
+            <a:ext cx="1874519" cy="1024128"/>
           </a:xfrm>
           <a:prstGeom prst="rect">
             <a:avLst/>
@@ -5599,8 +5599,8 @@
         </p:nvSpPr>
         <p:spPr>
           <a:xfrm>
-            <a:off x="4660288" y="2397152"/>
-            <a:ext cx="1881680" cy="265000"/>
+            <a:off x="4349390" y="2397152"/>
+            <a:ext cx="1744519" cy="265000"/>
           </a:xfrm>
           <a:prstGeom prst="rect">
             <a:avLst/>
@@ -5634,8 +5634,8 @@
         </p:nvSpPr>
         <p:spPr>
           <a:xfrm>
-            <a:off x="4650288" y="2664152"/>
-            <a:ext cx="1901680" cy="664128"/>
+            <a:off x="4339390" y="2664152"/>
+            <a:ext cx="1764519" cy="664128"/>
           </a:xfrm>
           <a:prstGeom prst="rect">
             <a:avLst/>
@@ -5671,8 +5671,8 @@
         </p:nvSpPr>
         <p:spPr>
           <a:xfrm>
-            <a:off x="2377440" y="2359152"/>
-            <a:ext cx="2011680" cy="1024128"/>
+            <a:off x="2221991" y="2359152"/>
+            <a:ext cx="1874519" cy="1024128"/>
           </a:xfrm>
           <a:prstGeom prst="rect">
             <a:avLst/>
@@ -5716,8 +5716,8 @@
         </p:nvSpPr>
         <p:spPr>
           <a:xfrm>
-            <a:off x="2447440" y="2397152"/>
-            <a:ext cx="1881680" cy="265000"/>
+            <a:off x="2291991" y="2397152"/>
+            <a:ext cx="1744519" cy="265000"/>
           </a:xfrm>
           <a:prstGeom prst="rect">
             <a:avLst/>
@@ -5751,8 +5751,8 @@
         </p:nvSpPr>
         <p:spPr>
           <a:xfrm>
-            <a:off x="2437440" y="2664152"/>
-            <a:ext cx="1901680" cy="664128"/>
+            <a:off x="2281991" y="2664152"/>
+            <a:ext cx="1764519" cy="664128"/>
           </a:xfrm>
           <a:prstGeom prst="rect">
             <a:avLst/>
@@ -5789,7 +5789,7 @@
         <p:spPr>
           <a:xfrm>
             <a:off x="164592" y="2359152"/>
-            <a:ext cx="2011680" cy="1024128"/>
+            <a:ext cx="1874519" cy="1024128"/>
           </a:xfrm>
           <a:prstGeom prst="rect">
             <a:avLst/>
@@ -5834,7 +5834,7 @@
         <p:spPr>
           <a:xfrm>
             <a:off x="234592" y="2397152"/>
-            <a:ext cx="1881680" cy="265000"/>
+            <a:ext cx="1744519" cy="265000"/>
           </a:xfrm>
           <a:prstGeom prst="rect">
             <a:avLst/>
@@ -5869,7 +5869,7 @@
         <p:spPr>
           <a:xfrm>
             <a:off x="224592" y="2664152"/>
-            <a:ext cx="1901680" cy="664128"/>
+            <a:ext cx="1764519" cy="664128"/>
           </a:xfrm>
           <a:prstGeom prst="rect">
             <a:avLst/>
@@ -5905,8 +5905,8 @@
         </p:nvSpPr>
         <p:spPr>
           <a:xfrm rot="10800000">
-            <a:off x="2226272" y="2796216"/>
-            <a:ext cx="101168" cy="150000"/>
+            <a:off x="2089111" y="2796216"/>
+            <a:ext cx="82880" cy="150000"/>
           </a:xfrm>
           <a:prstGeom prst="can">
             <a:avLst/>
@@ -5948,8 +5948,8 @@
         </p:nvSpPr>
         <p:spPr>
           <a:xfrm rot="10800000">
-            <a:off x="4439120" y="2796216"/>
-            <a:ext cx="101168" cy="150000"/>
+            <a:off x="4146510" y="2796216"/>
+            <a:ext cx="82880" cy="150000"/>
           </a:xfrm>
           <a:prstGeom prst="can">
             <a:avLst/>
@@ -5991,8 +5991,8 @@
         </p:nvSpPr>
         <p:spPr>
           <a:xfrm rot="10800000">
-            <a:off x="6651968" y="2796216"/>
-            <a:ext cx="101168" cy="150000"/>
+            <a:off x="6203909" y="2796216"/>
+            <a:ext cx="82880" cy="150000"/>
           </a:xfrm>
           <a:prstGeom prst="can">
             <a:avLst/>
@@ -12771,7 +12771,7 @@
         <p:spPr>
           <a:xfrm>
             <a:off x="201168" y="1051560"/>
-            <a:ext cx="2011680" cy="1097280"/>
+            <a:ext cx="1965960" cy="1097280"/>
           </a:xfrm>
           <a:prstGeom prst="rect">
             <a:avLst/>
@@ -12816,7 +12816,7 @@
         <p:spPr>
           <a:xfrm>
             <a:off x="261168" y="1106424"/>
-            <a:ext cx="1828800" cy="270000"/>
+            <a:ext cx="1885960" cy="270000"/>
           </a:xfrm>
           <a:prstGeom prst="rect">
             <a:avLst/>
@@ -12851,7 +12851,7 @@
         <p:spPr>
           <a:xfrm>
             <a:off x="256168" y="1417320"/>
-            <a:ext cx="1874519" cy="720000"/>
+            <a:ext cx="1895960" cy="720000"/>
           </a:xfrm>
           <a:prstGeom prst="rect">
             <a:avLst/>
@@ -12887,7 +12887,7 @@
         </p:nvSpPr>
         <p:spPr>
           <a:xfrm>
-            <a:off x="2242848" y="1510200"/>
+            <a:off x="2197128" y="1510200"/>
             <a:ext cx="200000" cy="180000"/>
           </a:xfrm>
           <a:prstGeom prst="can">
@@ -12930,8 +12930,8 @@
         </p:nvSpPr>
         <p:spPr>
           <a:xfrm>
-            <a:off x="2395728" y="1051560"/>
-            <a:ext cx="2011680" cy="1097280"/>
+            <a:off x="2368296" y="1051560"/>
+            <a:ext cx="1965960" cy="1097280"/>
           </a:xfrm>
           <a:prstGeom prst="rect">
             <a:avLst/>
@@ -12975,8 +12975,8 @@
         </p:nvSpPr>
         <p:spPr>
           <a:xfrm>
-            <a:off x="2455728" y="1106424"/>
-            <a:ext cx="1828800" cy="270000"/>
+            <a:off x="2428296" y="1106424"/>
+            <a:ext cx="1885960" cy="270000"/>
           </a:xfrm>
           <a:prstGeom prst="rect">
             <a:avLst/>
@@ -13010,8 +13010,8 @@
         </p:nvSpPr>
         <p:spPr>
           <a:xfrm>
-            <a:off x="2450728" y="1417320"/>
-            <a:ext cx="1874519" cy="720000"/>
+            <a:off x="2423296" y="1417320"/>
+            <a:ext cx="1895960" cy="720000"/>
           </a:xfrm>
           <a:prstGeom prst="rect">
             <a:avLst/>
@@ -13047,7 +13047,7 @@
         </p:nvSpPr>
         <p:spPr>
           <a:xfrm>
-            <a:off x="4437408" y="1510200"/>
+            <a:off x="4364256" y="1510200"/>
             <a:ext cx="200000" cy="180000"/>
           </a:xfrm>
           <a:prstGeom prst="can">
@@ -13090,8 +13090,8 @@
         </p:nvSpPr>
         <p:spPr>
           <a:xfrm>
-            <a:off x="4590288" y="1051560"/>
-            <a:ext cx="2011680" cy="1097280"/>
+            <a:off x="4535424" y="1051560"/>
+            <a:ext cx="1965960" cy="1097280"/>
           </a:xfrm>
           <a:prstGeom prst="rect">
             <a:avLst/>
@@ -13135,8 +13135,8 @@
         </p:nvSpPr>
         <p:spPr>
           <a:xfrm>
-            <a:off x="4650288" y="1106424"/>
-            <a:ext cx="1828800" cy="270000"/>
+            <a:off x="4595424" y="1106424"/>
+            <a:ext cx="1885960" cy="270000"/>
           </a:xfrm>
           <a:prstGeom prst="rect">
             <a:avLst/>
@@ -13170,8 +13170,8 @@
         </p:nvSpPr>
         <p:spPr>
           <a:xfrm>
-            <a:off x="4645288" y="1417320"/>
-            <a:ext cx="1874519" cy="720000"/>
+            <a:off x="4590424" y="1417320"/>
+            <a:ext cx="1895960" cy="720000"/>
           </a:xfrm>
           <a:prstGeom prst="rect">
             <a:avLst/>
@@ -13207,7 +13207,7 @@
         </p:nvSpPr>
         <p:spPr>
           <a:xfrm>
-            <a:off x="6631968" y="1510200"/>
+            <a:off x="6531384" y="1510200"/>
             <a:ext cx="200000" cy="180000"/>
           </a:xfrm>
           <a:prstGeom prst="can">
@@ -13250,8 +13250,8 @@
         </p:nvSpPr>
         <p:spPr>
           <a:xfrm>
-            <a:off x="6784848" y="1051560"/>
-            <a:ext cx="2011680" cy="1097280"/>
+            <a:off x="6702552" y="1051560"/>
+            <a:ext cx="1965960" cy="1097280"/>
           </a:xfrm>
           <a:prstGeom prst="rect">
             <a:avLst/>
@@ -13295,8 +13295,8 @@
         </p:nvSpPr>
         <p:spPr>
           <a:xfrm>
-            <a:off x="6844848" y="1106424"/>
-            <a:ext cx="1828800" cy="270000"/>
+            <a:off x="6762552" y="1106424"/>
+            <a:ext cx="1885960" cy="270000"/>
           </a:xfrm>
           <a:prstGeom prst="rect">
             <a:avLst/>
@@ -13330,8 +13330,8 @@
         </p:nvSpPr>
         <p:spPr>
           <a:xfrm>
-            <a:off x="6839848" y="1417320"/>
-            <a:ext cx="1874519" cy="720000"/>
+            <a:off x="6757552" y="1417320"/>
+            <a:ext cx="1895960" cy="720000"/>
           </a:xfrm>
           <a:prstGeom prst="rect">
             <a:avLst/>
